--- a/WORD_MODEL/OHS_DATA_MD/V4/룰베이스_v5/작업보고_PPT_20260616.pptx
+++ b/WORD_MODEL/OHS_DATA_MD/V4/룰베이스_v5/작업보고_PPT_20260616.pptx
@@ -72,6 +72,45 @@
   <p:sldLayoutIdLst>
     <p:sldLayoutId id="2147483649" r:id="rIdL1"/>
   </p:sldLayoutIdLst>
+  <p:txStyles>
+    <p:titleStyle>
+      <a:lvl1pPr>
+        <a:defRPr sz="4400">
+          <a:solidFill>
+            <a:schemeClr val="tx1"/>
+          </a:solidFill>
+          <a:latin typeface="Malgun Gothic"/>
+        </a:defRPr>
+      </a:lvl1pPr>
+    </p:titleStyle>
+    <p:bodyStyle>
+      <a:lvl1pPr>
+        <a:defRPr sz="1800">
+          <a:solidFill>
+            <a:schemeClr val="tx1"/>
+          </a:solidFill>
+          <a:latin typeface="Malgun Gothic"/>
+        </a:defRPr>
+      </a:lvl1pPr>
+      <a:lvl2pPr>
+        <a:defRPr sz="1600">
+          <a:latin typeface="Malgun Gothic"/>
+        </a:defRPr>
+      </a:lvl2pPr>
+      <a:lvl3pPr>
+        <a:defRPr sz="1400">
+          <a:latin typeface="Malgun Gothic"/>
+        </a:defRPr>
+      </a:lvl3pPr>
+    </p:bodyStyle>
+    <p:otherStyle>
+      <a:lvl1pPr>
+        <a:defRPr sz="1800">
+          <a:latin typeface="Malgun Gothic"/>
+        </a:defRPr>
+      </a:lvl1pPr>
+    </p:otherStyle>
+  </p:txStyles>
 </p:sldMaster>
 </file>
 
